--- a/assets/powerpoints/module-travail/A3-retard-absence-ou-abandon.pptx
+++ b/assets/powerpoints/module-travail/A3-retard-absence-ou-abandon.pptx
@@ -4649,7 +4649,7 @@
                 </a:solidFill>
                 <a:latin typeface="Verdana"/>
               </a:rPr>
-              <a:t>SÉANCE A3  ·  MODULE 3</a:t>
+              <a:t>SÉANCE A3  ·  MODULE 4</a:t>
             </a:r>
           </a:p>
         </p:txBody>

--- a/assets/powerpoints/module-travail/A3-retard-absence-ou-abandon.pptx
+++ b/assets/powerpoints/module-travail/A3-retard-absence-ou-abandon.pptx
@@ -4645,7 +4645,7 @@
             <a:r>
               <a:rPr sz="1300" b="1" i="0" spc="156">
                 <a:solidFill>
-                  <a:srgbClr val="166534"/>
+                  <a:srgbClr val="A5335F"/>
                 </a:solidFill>
                 <a:latin typeface="Verdana"/>
               </a:rPr>
@@ -4985,7 +4985,7 @@
             <a:r>
               <a:rPr sz="1300" b="1" i="0" spc="156">
                 <a:solidFill>
-                  <a:srgbClr val="166534"/>
+                  <a:srgbClr val="A5335F"/>
                 </a:solidFill>
                 <a:latin typeface="Verdana"/>
               </a:rPr>
@@ -5534,7 +5534,7 @@
             <a:r>
               <a:rPr sz="1300" b="1" i="0" spc="156">
                 <a:solidFill>
-                  <a:srgbClr val="166534"/>
+                  <a:srgbClr val="A5335F"/>
                 </a:solidFill>
                 <a:latin typeface="Verdana"/>
               </a:rPr>
@@ -6083,7 +6083,7 @@
             <a:r>
               <a:rPr sz="1300" b="1" i="0" spc="156">
                 <a:solidFill>
-                  <a:srgbClr val="166534"/>
+                  <a:srgbClr val="A5335F"/>
                 </a:solidFill>
                 <a:latin typeface="Verdana"/>
               </a:rPr>
@@ -6233,7 +6233,7 @@
             </a:avLst>
           </a:prstGeom>
           <a:solidFill>
-            <a:srgbClr val="E3F1E7"/>
+            <a:srgbClr val="FCE9F0"/>
           </a:solidFill>
           <a:ln>
             <a:noFill/>
@@ -6290,7 +6290,7 @@
             <a:r>
               <a:rPr sz="1500" b="1" i="0">
                 <a:solidFill>
-                  <a:srgbClr val="166534"/>
+                  <a:srgbClr val="A5335F"/>
                 </a:solidFill>
                 <a:latin typeface="Verdana"/>
               </a:rPr>
@@ -6401,7 +6401,7 @@
             </a:avLst>
           </a:prstGeom>
           <a:solidFill>
-            <a:srgbClr val="E3F1E7"/>
+            <a:srgbClr val="FCE9F0"/>
           </a:solidFill>
           <a:ln>
             <a:noFill/>
@@ -6458,7 +6458,7 @@
             <a:r>
               <a:rPr sz="1500" b="1" i="0">
                 <a:solidFill>
-                  <a:srgbClr val="166534"/>
+                  <a:srgbClr val="A5335F"/>
                 </a:solidFill>
                 <a:latin typeface="Verdana"/>
               </a:rPr>
@@ -6569,7 +6569,7 @@
             </a:avLst>
           </a:prstGeom>
           <a:solidFill>
-            <a:srgbClr val="E3F1E7"/>
+            <a:srgbClr val="FCE9F0"/>
           </a:solidFill>
           <a:ln>
             <a:noFill/>
@@ -6626,7 +6626,7 @@
             <a:r>
               <a:rPr sz="1500" b="1" i="0">
                 <a:solidFill>
-                  <a:srgbClr val="166534"/>
+                  <a:srgbClr val="A5335F"/>
                 </a:solidFill>
                 <a:latin typeface="Verdana"/>
               </a:rPr>
@@ -6737,7 +6737,7 @@
             </a:avLst>
           </a:prstGeom>
           <a:solidFill>
-            <a:srgbClr val="E3F1E7"/>
+            <a:srgbClr val="FCE9F0"/>
           </a:solidFill>
           <a:ln>
             <a:noFill/>
@@ -6794,7 +6794,7 @@
             <a:r>
               <a:rPr sz="1500" b="1" i="0">
                 <a:solidFill>
-                  <a:srgbClr val="166534"/>
+                  <a:srgbClr val="A5335F"/>
                 </a:solidFill>
                 <a:latin typeface="Verdana"/>
               </a:rPr>
@@ -7010,7 +7010,7 @@
             <a:r>
               <a:rPr sz="1300" b="1" i="0" spc="156">
                 <a:solidFill>
-                  <a:srgbClr val="166534"/>
+                  <a:srgbClr val="A5335F"/>
                 </a:solidFill>
                 <a:latin typeface="Verdana"/>
               </a:rPr>
@@ -7160,7 +7160,7 @@
             </a:avLst>
           </a:prstGeom>
           <a:solidFill>
-            <a:srgbClr val="E3F1E7"/>
+            <a:srgbClr val="FCE9F0"/>
           </a:solidFill>
           <a:ln>
             <a:noFill/>
@@ -7217,7 +7217,7 @@
             <a:r>
               <a:rPr sz="1500" b="1" i="0">
                 <a:solidFill>
-                  <a:srgbClr val="166534"/>
+                  <a:srgbClr val="A5335F"/>
                 </a:solidFill>
                 <a:latin typeface="Verdana"/>
               </a:rPr>
@@ -7337,7 +7337,7 @@
             </a:avLst>
           </a:prstGeom>
           <a:solidFill>
-            <a:srgbClr val="E3F1E7"/>
+            <a:srgbClr val="FCE9F0"/>
           </a:solidFill>
           <a:ln>
             <a:noFill/>
@@ -7394,7 +7394,7 @@
             <a:r>
               <a:rPr sz="1500" b="1" i="0">
                 <a:solidFill>
-                  <a:srgbClr val="166534"/>
+                  <a:srgbClr val="A5335F"/>
                 </a:solidFill>
                 <a:latin typeface="Verdana"/>
               </a:rPr>
@@ -7514,7 +7514,7 @@
             </a:avLst>
           </a:prstGeom>
           <a:solidFill>
-            <a:srgbClr val="E3F1E7"/>
+            <a:srgbClr val="FCE9F0"/>
           </a:solidFill>
           <a:ln>
             <a:noFill/>
@@ -7571,7 +7571,7 @@
             <a:r>
               <a:rPr sz="1500" b="1" i="0">
                 <a:solidFill>
-                  <a:srgbClr val="166534"/>
+                  <a:srgbClr val="A5335F"/>
                 </a:solidFill>
                 <a:latin typeface="Verdana"/>
               </a:rPr>
@@ -7691,7 +7691,7 @@
             </a:avLst>
           </a:prstGeom>
           <a:solidFill>
-            <a:srgbClr val="E3F1E7"/>
+            <a:srgbClr val="FCE9F0"/>
           </a:solidFill>
           <a:ln>
             <a:noFill/>
@@ -7748,7 +7748,7 @@
             <a:r>
               <a:rPr sz="1500" b="1" i="0">
                 <a:solidFill>
-                  <a:srgbClr val="166534"/>
+                  <a:srgbClr val="A5335F"/>
                 </a:solidFill>
                 <a:latin typeface="Verdana"/>
               </a:rPr>
@@ -7973,7 +7973,7 @@
             <a:r>
               <a:rPr sz="1300" b="1" i="0" spc="156">
                 <a:solidFill>
-                  <a:srgbClr val="166534"/>
+                  <a:srgbClr val="A5335F"/>
                 </a:solidFill>
                 <a:latin typeface="Verdana"/>
               </a:rPr>
@@ -8123,7 +8123,7 @@
             </a:avLst>
           </a:prstGeom>
           <a:solidFill>
-            <a:srgbClr val="E3F1E7"/>
+            <a:srgbClr val="FCE9F0"/>
           </a:solidFill>
           <a:ln>
             <a:noFill/>
@@ -8180,7 +8180,7 @@
             <a:r>
               <a:rPr sz="1500" b="1" i="0">
                 <a:solidFill>
-                  <a:srgbClr val="166534"/>
+                  <a:srgbClr val="A5335F"/>
                 </a:solidFill>
                 <a:latin typeface="Verdana"/>
               </a:rPr>
@@ -8291,7 +8291,7 @@
             </a:avLst>
           </a:prstGeom>
           <a:solidFill>
-            <a:srgbClr val="E3F1E7"/>
+            <a:srgbClr val="FCE9F0"/>
           </a:solidFill>
           <a:ln>
             <a:noFill/>
@@ -8348,7 +8348,7 @@
             <a:r>
               <a:rPr sz="1500" b="1" i="0">
                 <a:solidFill>
-                  <a:srgbClr val="166534"/>
+                  <a:srgbClr val="A5335F"/>
                 </a:solidFill>
                 <a:latin typeface="Verdana"/>
               </a:rPr>
@@ -8459,7 +8459,7 @@
             </a:avLst>
           </a:prstGeom>
           <a:solidFill>
-            <a:srgbClr val="E3F1E7"/>
+            <a:srgbClr val="FCE9F0"/>
           </a:solidFill>
           <a:ln>
             <a:noFill/>
@@ -8516,7 +8516,7 @@
             <a:r>
               <a:rPr sz="1500" b="1" i="0">
                 <a:solidFill>
-                  <a:srgbClr val="166534"/>
+                  <a:srgbClr val="A5335F"/>
                 </a:solidFill>
                 <a:latin typeface="Verdana"/>
               </a:rPr>
@@ -8627,7 +8627,7 @@
             </a:avLst>
           </a:prstGeom>
           <a:solidFill>
-            <a:srgbClr val="E3F1E7"/>
+            <a:srgbClr val="FCE9F0"/>
           </a:solidFill>
           <a:ln>
             <a:noFill/>
@@ -8684,7 +8684,7 @@
             <a:r>
               <a:rPr sz="1500" b="1" i="0">
                 <a:solidFill>
-                  <a:srgbClr val="166534"/>
+                  <a:srgbClr val="A5335F"/>
                 </a:solidFill>
                 <a:latin typeface="Verdana"/>
               </a:rPr>
@@ -8900,7 +8900,7 @@
             <a:r>
               <a:rPr sz="1300" b="1" i="0" spc="156">
                 <a:solidFill>
-                  <a:srgbClr val="166534"/>
+                  <a:srgbClr val="A5335F"/>
                 </a:solidFill>
                 <a:latin typeface="Verdana"/>
               </a:rPr>
@@ -9050,7 +9050,7 @@
             </a:avLst>
           </a:prstGeom>
           <a:solidFill>
-            <a:srgbClr val="E3F1E7"/>
+            <a:srgbClr val="FCE9F0"/>
           </a:solidFill>
           <a:ln>
             <a:noFill/>
@@ -9107,7 +9107,7 @@
             <a:r>
               <a:rPr sz="1500" b="1" i="0">
                 <a:solidFill>
-                  <a:srgbClr val="166534"/>
+                  <a:srgbClr val="A5335F"/>
                 </a:solidFill>
                 <a:latin typeface="Verdana"/>
               </a:rPr>
@@ -9227,7 +9227,7 @@
             </a:avLst>
           </a:prstGeom>
           <a:solidFill>
-            <a:srgbClr val="E3F1E7"/>
+            <a:srgbClr val="FCE9F0"/>
           </a:solidFill>
           <a:ln>
             <a:noFill/>
@@ -9284,7 +9284,7 @@
             <a:r>
               <a:rPr sz="1500" b="1" i="0">
                 <a:solidFill>
-                  <a:srgbClr val="166534"/>
+                  <a:srgbClr val="A5335F"/>
                 </a:solidFill>
                 <a:latin typeface="Verdana"/>
               </a:rPr>
@@ -9404,7 +9404,7 @@
             </a:avLst>
           </a:prstGeom>
           <a:solidFill>
-            <a:srgbClr val="E3F1E7"/>
+            <a:srgbClr val="FCE9F0"/>
           </a:solidFill>
           <a:ln>
             <a:noFill/>
@@ -9461,7 +9461,7 @@
             <a:r>
               <a:rPr sz="1500" b="1" i="0">
                 <a:solidFill>
-                  <a:srgbClr val="166534"/>
+                  <a:srgbClr val="A5335F"/>
                 </a:solidFill>
                 <a:latin typeface="Verdana"/>
               </a:rPr>
@@ -9581,7 +9581,7 @@
             </a:avLst>
           </a:prstGeom>
           <a:solidFill>
-            <a:srgbClr val="E3F1E7"/>
+            <a:srgbClr val="FCE9F0"/>
           </a:solidFill>
           <a:ln>
             <a:noFill/>
@@ -9638,7 +9638,7 @@
             <a:r>
               <a:rPr sz="1500" b="1" i="0">
                 <a:solidFill>
-                  <a:srgbClr val="166534"/>
+                  <a:srgbClr val="A5335F"/>
                 </a:solidFill>
                 <a:latin typeface="Verdana"/>
               </a:rPr>
@@ -10326,7 +10326,7 @@
             <a:r>
               <a:rPr sz="1300" b="1" i="0" spc="156">
                 <a:solidFill>
-                  <a:srgbClr val="166534"/>
+                  <a:srgbClr val="A5335F"/>
                 </a:solidFill>
                 <a:latin typeface="Verdana"/>
               </a:rPr>
@@ -10437,7 +10437,7 @@
             </a:avLst>
           </a:prstGeom>
           <a:solidFill>
-            <a:srgbClr val="E3F1E7"/>
+            <a:srgbClr val="FCE9F0"/>
           </a:solidFill>
           <a:ln>
             <a:noFill/>
@@ -10494,7 +10494,7 @@
             <a:r>
               <a:rPr sz="1500" b="1" i="0">
                 <a:solidFill>
-                  <a:srgbClr val="166534"/>
+                  <a:srgbClr val="A5335F"/>
                 </a:solidFill>
                 <a:latin typeface="Verdana"/>
               </a:rPr>
@@ -10605,7 +10605,7 @@
             </a:avLst>
           </a:prstGeom>
           <a:solidFill>
-            <a:srgbClr val="E3F1E7"/>
+            <a:srgbClr val="FCE9F0"/>
           </a:solidFill>
           <a:ln>
             <a:noFill/>
@@ -10662,7 +10662,7 @@
             <a:r>
               <a:rPr sz="1500" b="1" i="0">
                 <a:solidFill>
-                  <a:srgbClr val="166534"/>
+                  <a:srgbClr val="A5335F"/>
                 </a:solidFill>
                 <a:latin typeface="Verdana"/>
               </a:rPr>
@@ -10773,7 +10773,7 @@
             </a:avLst>
           </a:prstGeom>
           <a:solidFill>
-            <a:srgbClr val="E3F1E7"/>
+            <a:srgbClr val="FCE9F0"/>
           </a:solidFill>
           <a:ln>
             <a:noFill/>
@@ -10830,7 +10830,7 @@
             <a:r>
               <a:rPr sz="1500" b="1" i="0">
                 <a:solidFill>
-                  <a:srgbClr val="166534"/>
+                  <a:srgbClr val="A5335F"/>
                 </a:solidFill>
                 <a:latin typeface="Verdana"/>
               </a:rPr>
@@ -10941,7 +10941,7 @@
             </a:avLst>
           </a:prstGeom>
           <a:solidFill>
-            <a:srgbClr val="E3F1E7"/>
+            <a:srgbClr val="FCE9F0"/>
           </a:solidFill>
           <a:ln>
             <a:noFill/>
@@ -10998,7 +10998,7 @@
             <a:r>
               <a:rPr sz="1500" b="1" i="0">
                 <a:solidFill>
-                  <a:srgbClr val="166534"/>
+                  <a:srgbClr val="A5335F"/>
                 </a:solidFill>
                 <a:latin typeface="Verdana"/>
               </a:rPr>
@@ -11214,7 +11214,7 @@
             <a:r>
               <a:rPr sz="1300" b="1" i="0" spc="156">
                 <a:solidFill>
-                  <a:srgbClr val="166534"/>
+                  <a:srgbClr val="A5335F"/>
                 </a:solidFill>
                 <a:latin typeface="Verdana"/>
               </a:rPr>
@@ -11455,7 +11455,7 @@
             <a:r>
               <a:rPr sz="1600" b="1" i="0">
                 <a:solidFill>
-                  <a:srgbClr val="166534"/>
+                  <a:srgbClr val="A5335F"/>
                 </a:solidFill>
                 <a:latin typeface="Verdana"/>
               </a:rPr>
@@ -11614,7 +11614,7 @@
             <a:r>
               <a:rPr sz="1600" b="1" i="0">
                 <a:solidFill>
-                  <a:srgbClr val="166534"/>
+                  <a:srgbClr val="A5335F"/>
                 </a:solidFill>
                 <a:latin typeface="Verdana"/>
               </a:rPr>
@@ -11773,7 +11773,7 @@
             <a:r>
               <a:rPr sz="1600" b="1" i="0">
                 <a:solidFill>
-                  <a:srgbClr val="166534"/>
+                  <a:srgbClr val="A5335F"/>
                 </a:solidFill>
                 <a:latin typeface="Verdana"/>
               </a:rPr>
@@ -12113,7 +12113,7 @@
             <a:r>
               <a:rPr sz="1300" b="1" i="0" spc="156">
                 <a:solidFill>
-                  <a:srgbClr val="166534"/>
+                  <a:srgbClr val="A5335F"/>
                 </a:solidFill>
                 <a:latin typeface="Verdana"/>
               </a:rPr>
@@ -12139,7 +12139,7 @@
             </a:avLst>
           </a:prstGeom>
           <a:solidFill>
-            <a:srgbClr val="E3F1E7"/>
+            <a:srgbClr val="FCE9F0"/>
           </a:solidFill>
           <a:ln w="12700">
             <a:solidFill>
@@ -12460,7 +12460,7 @@
             <a:r>
               <a:rPr sz="1300" b="1" i="0" spc="156">
                 <a:solidFill>
-                  <a:srgbClr val="166534"/>
+                  <a:srgbClr val="A5335F"/>
                 </a:solidFill>
                 <a:latin typeface="Verdana"/>
               </a:rPr>
@@ -12639,7 +12639,7 @@
             <a:avLst/>
           </a:prstGeom>
           <a:solidFill>
-            <a:srgbClr val="166534"/>
+            <a:srgbClr val="A5335F"/>
           </a:solidFill>
           <a:ln>
             <a:noFill/>
@@ -12766,7 +12766,7 @@
             <a:avLst/>
           </a:prstGeom>
           <a:solidFill>
-            <a:srgbClr val="166534"/>
+            <a:srgbClr val="A5335F"/>
           </a:solidFill>
           <a:ln>
             <a:noFill/>
@@ -12893,7 +12893,7 @@
             <a:avLst/>
           </a:prstGeom>
           <a:solidFill>
-            <a:srgbClr val="166534"/>
+            <a:srgbClr val="A5335F"/>
           </a:solidFill>
           <a:ln>
             <a:noFill/>
@@ -13020,7 +13020,7 @@
             <a:avLst/>
           </a:prstGeom>
           <a:solidFill>
-            <a:srgbClr val="166534"/>
+            <a:srgbClr val="A5335F"/>
           </a:solidFill>
           <a:ln>
             <a:noFill/>
@@ -13254,7 +13254,7 @@
             <a:r>
               <a:rPr sz="1300" b="1" i="0" spc="156">
                 <a:solidFill>
-                  <a:srgbClr val="166534"/>
+                  <a:srgbClr val="A5335F"/>
                 </a:solidFill>
                 <a:latin typeface="Verdana"/>
               </a:rPr>
@@ -13378,7 +13378,7 @@
             <a:r>
               <a:rPr sz="2100" b="1" i="0">
                 <a:solidFill>
-                  <a:srgbClr val="166534"/>
+                  <a:srgbClr val="A5335F"/>
                 </a:solidFill>
                 <a:latin typeface="Verdana"/>
               </a:rPr>
@@ -13502,7 +13502,7 @@
             <a:r>
               <a:rPr sz="2100" b="1" i="0">
                 <a:solidFill>
-                  <a:srgbClr val="166534"/>
+                  <a:srgbClr val="A5335F"/>
                 </a:solidFill>
                 <a:latin typeface="Verdana"/>
               </a:rPr>
@@ -13626,7 +13626,7 @@
             <a:r>
               <a:rPr sz="2100" b="1" i="0">
                 <a:solidFill>
-                  <a:srgbClr val="166534"/>
+                  <a:srgbClr val="A5335F"/>
                 </a:solidFill>
                 <a:latin typeface="Verdana"/>
               </a:rPr>
@@ -13750,7 +13750,7 @@
             <a:r>
               <a:rPr sz="2100" b="1" i="0">
                 <a:solidFill>
-                  <a:srgbClr val="166534"/>
+                  <a:srgbClr val="A5335F"/>
                 </a:solidFill>
                 <a:latin typeface="Verdana"/>
               </a:rPr>
@@ -13966,7 +13966,7 @@
             <a:r>
               <a:rPr sz="1300" b="1" i="0" spc="156">
                 <a:solidFill>
-                  <a:srgbClr val="166534"/>
+                  <a:srgbClr val="A5335F"/>
                 </a:solidFill>
                 <a:latin typeface="Verdana"/>
               </a:rPr>
@@ -14168,7 +14168,7 @@
             <a:r>
               <a:rPr sz="1800" b="1" i="0">
                 <a:solidFill>
-                  <a:srgbClr val="166534"/>
+                  <a:srgbClr val="A5335F"/>
                 </a:solidFill>
                 <a:latin typeface="Verdana"/>
               </a:rPr>
@@ -14288,7 +14288,7 @@
             <a:r>
               <a:rPr sz="1800" b="1" i="0">
                 <a:solidFill>
-                  <a:srgbClr val="166534"/>
+                  <a:srgbClr val="A5335F"/>
                 </a:solidFill>
                 <a:latin typeface="Verdana"/>
               </a:rPr>
@@ -14408,7 +14408,7 @@
             <a:r>
               <a:rPr sz="1800" b="1" i="0">
                 <a:solidFill>
-                  <a:srgbClr val="166534"/>
+                  <a:srgbClr val="A5335F"/>
                 </a:solidFill>
                 <a:latin typeface="Verdana"/>
               </a:rPr>
@@ -14528,7 +14528,7 @@
             <a:r>
               <a:rPr sz="1800" b="1" i="0">
                 <a:solidFill>
-                  <a:srgbClr val="166534"/>
+                  <a:srgbClr val="A5335F"/>
                 </a:solidFill>
                 <a:latin typeface="Verdana"/>
               </a:rPr>
@@ -14829,7 +14829,7 @@
             <a:r>
               <a:rPr sz="1300" b="1" i="0" spc="156">
                 <a:solidFill>
-                  <a:srgbClr val="166534"/>
+                  <a:srgbClr val="A5335F"/>
                 </a:solidFill>
                 <a:latin typeface="Verdana"/>
               </a:rPr>
@@ -14979,7 +14979,7 @@
             </a:avLst>
           </a:prstGeom>
           <a:solidFill>
-            <a:srgbClr val="E3F1E7"/>
+            <a:srgbClr val="FCE9F0"/>
           </a:solidFill>
           <a:ln>
             <a:noFill/>
@@ -15036,7 +15036,7 @@
             <a:r>
               <a:rPr sz="1500" b="1" i="0">
                 <a:solidFill>
-                  <a:srgbClr val="166534"/>
+                  <a:srgbClr val="A5335F"/>
                 </a:solidFill>
                 <a:latin typeface="Verdana"/>
               </a:rPr>
@@ -15147,7 +15147,7 @@
             </a:avLst>
           </a:prstGeom>
           <a:solidFill>
-            <a:srgbClr val="E3F1E7"/>
+            <a:srgbClr val="FCE9F0"/>
           </a:solidFill>
           <a:ln>
             <a:noFill/>
@@ -15204,7 +15204,7 @@
             <a:r>
               <a:rPr sz="1500" b="1" i="0">
                 <a:solidFill>
-                  <a:srgbClr val="166534"/>
+                  <a:srgbClr val="A5335F"/>
                 </a:solidFill>
                 <a:latin typeface="Verdana"/>
               </a:rPr>
@@ -15315,7 +15315,7 @@
             </a:avLst>
           </a:prstGeom>
           <a:solidFill>
-            <a:srgbClr val="E3F1E7"/>
+            <a:srgbClr val="FCE9F0"/>
           </a:solidFill>
           <a:ln>
             <a:noFill/>
@@ -15372,7 +15372,7 @@
             <a:r>
               <a:rPr sz="1500" b="1" i="0">
                 <a:solidFill>
-                  <a:srgbClr val="166534"/>
+                  <a:srgbClr val="A5335F"/>
                 </a:solidFill>
                 <a:latin typeface="Verdana"/>
               </a:rPr>
@@ -15483,7 +15483,7 @@
             </a:avLst>
           </a:prstGeom>
           <a:solidFill>
-            <a:srgbClr val="E3F1E7"/>
+            <a:srgbClr val="FCE9F0"/>
           </a:solidFill>
           <a:ln>
             <a:noFill/>
@@ -15540,7 +15540,7 @@
             <a:r>
               <a:rPr sz="1500" b="1" i="0">
                 <a:solidFill>
-                  <a:srgbClr val="166534"/>
+                  <a:srgbClr val="A5335F"/>
                 </a:solidFill>
                 <a:latin typeface="Verdana"/>
               </a:rPr>
@@ -15651,7 +15651,7 @@
             </a:avLst>
           </a:prstGeom>
           <a:solidFill>
-            <a:srgbClr val="E3F1E7"/>
+            <a:srgbClr val="FCE9F0"/>
           </a:solidFill>
           <a:ln>
             <a:noFill/>
@@ -15708,7 +15708,7 @@
             <a:r>
               <a:rPr sz="1500" b="1" i="0">
                 <a:solidFill>
-                  <a:srgbClr val="166534"/>
+                  <a:srgbClr val="A5335F"/>
                 </a:solidFill>
                 <a:latin typeface="Verdana"/>
               </a:rPr>
@@ -15924,7 +15924,7 @@
             <a:r>
               <a:rPr sz="1300" b="1" i="0" spc="156">
                 <a:solidFill>
-                  <a:srgbClr val="166534"/>
+                  <a:srgbClr val="A5335F"/>
                 </a:solidFill>
                 <a:latin typeface="Verdana"/>
               </a:rPr>
@@ -16074,7 +16074,7 @@
             </a:avLst>
           </a:prstGeom>
           <a:solidFill>
-            <a:srgbClr val="E3F1E7"/>
+            <a:srgbClr val="FCE9F0"/>
           </a:solidFill>
           <a:ln>
             <a:noFill/>
@@ -16131,7 +16131,7 @@
             <a:r>
               <a:rPr sz="1500" b="1" i="0">
                 <a:solidFill>
-                  <a:srgbClr val="166534"/>
+                  <a:srgbClr val="A5335F"/>
                 </a:solidFill>
                 <a:latin typeface="Verdana"/>
               </a:rPr>
@@ -16251,7 +16251,7 @@
             </a:avLst>
           </a:prstGeom>
           <a:solidFill>
-            <a:srgbClr val="E3F1E7"/>
+            <a:srgbClr val="FCE9F0"/>
           </a:solidFill>
           <a:ln>
             <a:noFill/>
@@ -16308,7 +16308,7 @@
             <a:r>
               <a:rPr sz="1500" b="1" i="0">
                 <a:solidFill>
-                  <a:srgbClr val="166534"/>
+                  <a:srgbClr val="A5335F"/>
                 </a:solidFill>
                 <a:latin typeface="Verdana"/>
               </a:rPr>
@@ -16428,7 +16428,7 @@
             </a:avLst>
           </a:prstGeom>
           <a:solidFill>
-            <a:srgbClr val="E3F1E7"/>
+            <a:srgbClr val="FCE9F0"/>
           </a:solidFill>
           <a:ln>
             <a:noFill/>
@@ -16485,7 +16485,7 @@
             <a:r>
               <a:rPr sz="1500" b="1" i="0">
                 <a:solidFill>
-                  <a:srgbClr val="166534"/>
+                  <a:srgbClr val="A5335F"/>
                 </a:solidFill>
                 <a:latin typeface="Verdana"/>
               </a:rPr>
@@ -16605,7 +16605,7 @@
             </a:avLst>
           </a:prstGeom>
           <a:solidFill>
-            <a:srgbClr val="E3F1E7"/>
+            <a:srgbClr val="FCE9F0"/>
           </a:solidFill>
           <a:ln>
             <a:noFill/>
@@ -16662,7 +16662,7 @@
             <a:r>
               <a:rPr sz="1500" b="1" i="0">
                 <a:solidFill>
-                  <a:srgbClr val="166534"/>
+                  <a:srgbClr val="A5335F"/>
                 </a:solidFill>
                 <a:latin typeface="Verdana"/>
               </a:rPr>
@@ -16782,7 +16782,7 @@
             </a:avLst>
           </a:prstGeom>
           <a:solidFill>
-            <a:srgbClr val="E3F1E7"/>
+            <a:srgbClr val="FCE9F0"/>
           </a:solidFill>
           <a:ln>
             <a:noFill/>
@@ -16839,7 +16839,7 @@
             <a:r>
               <a:rPr sz="1500" b="1" i="0">
                 <a:solidFill>
-                  <a:srgbClr val="166534"/>
+                  <a:srgbClr val="A5335F"/>
                 </a:solidFill>
                 <a:latin typeface="Verdana"/>
               </a:rPr>
